--- a/Pregrado/Creatividad y pensamiento innovador/Clases/Sesion 07 - Innovación local–internacional · entidades de apoyo/Presentacion.pptx
+++ b/Pregrado/Creatividad y pensamiento innovador/Clases/Sesion 07 - Innovación local–internacional · entidades de apoyo/Presentacion.pptx
@@ -3366,41 +3366,6 @@
                 <a:latin typeface="Calibri"/>
               </a:rPr>
               <a:t> CREATIVIDAD Y PENSAMIENTO INNOVADOR</a:t>
-            </a:r>
-          </a:p>
-        </p:txBody>
-      </p:sp>
-      <p:sp>
-        <p:nvSpPr>
-          <p:cNvPr id="7" name="TextBox 6"/>
-          <p:cNvSpPr txBox="1"/>
-          <p:nvPr/>
-        </p:nvSpPr>
-        <p:spPr>
-          <a:xfrm>
-            <a:off x="2194560" y="6446520"/>
-            <a:ext cx="5943600" cy="274320"/>
-          </a:xfrm>
-          <a:prstGeom prst="rect">
-            <a:avLst/>
-          </a:prstGeom>
-          <a:noFill/>
-        </p:spPr>
-        <p:txBody>
-          <a:bodyPr wrap="square" anchor="t" lIns="0" rIns="0" tIns="0" bIns="0">
-            <a:spAutoFit/>
-          </a:bodyPr>
-          <a:lstStyle/>
-          <a:p>
-            <a:pPr algn="l"/>
-            <a:r>
-              <a:rPr sz="1000" b="1" i="0">
-                <a:solidFill>
-                  <a:srgbClr val="8F989D"/>
-                </a:solidFill>
-                <a:latin typeface="Calibri"/>
-              </a:rPr>
-              <a:t>Inicio 5:10 pm</a:t>
             </a:r>
           </a:p>
         </p:txBody>
@@ -4180,41 +4145,6 @@
         </p:nvSpPr>
         <p:spPr>
           <a:xfrm>
-            <a:off x="2194560" y="6446520"/>
-            <a:ext cx="5943600" cy="274320"/>
-          </a:xfrm>
-          <a:prstGeom prst="rect">
-            <a:avLst/>
-          </a:prstGeom>
-          <a:noFill/>
-        </p:spPr>
-        <p:txBody>
-          <a:bodyPr wrap="square" anchor="t" lIns="0" rIns="0" tIns="0" bIns="0">
-            <a:spAutoFit/>
-          </a:bodyPr>
-          <a:lstStyle/>
-          <a:p>
-            <a:pPr algn="l"/>
-            <a:r>
-              <a:rPr sz="1000" b="1" i="0">
-                <a:solidFill>
-                  <a:srgbClr val="8F989D"/>
-                </a:solidFill>
-                <a:latin typeface="Calibri"/>
-              </a:rPr>
-              <a:t>Inicio 5:10 pm</a:t>
-            </a:r>
-          </a:p>
-        </p:txBody>
-      </p:sp>
-      <p:sp>
-        <p:nvSpPr>
-          <p:cNvPr id="7" name="TextBox 6"/>
-          <p:cNvSpPr txBox="1"/>
-          <p:nvPr/>
-        </p:nvSpPr>
-        <p:spPr>
-          <a:xfrm>
             <a:off x="11094415" y="6446520"/>
             <a:ext cx="548640" cy="274320"/>
           </a:xfrm>
@@ -4686,41 +4616,6 @@
         </p:nvSpPr>
         <p:spPr>
           <a:xfrm>
-            <a:off x="2194560" y="6446520"/>
-            <a:ext cx="5943600" cy="274320"/>
-          </a:xfrm>
-          <a:prstGeom prst="rect">
-            <a:avLst/>
-          </a:prstGeom>
-          <a:noFill/>
-        </p:spPr>
-        <p:txBody>
-          <a:bodyPr wrap="square" anchor="t" lIns="0" rIns="0" tIns="0" bIns="0">
-            <a:spAutoFit/>
-          </a:bodyPr>
-          <a:lstStyle/>
-          <a:p>
-            <a:pPr algn="l"/>
-            <a:r>
-              <a:rPr sz="1000" b="1" i="0">
-                <a:solidFill>
-                  <a:srgbClr val="8F989D"/>
-                </a:solidFill>
-                <a:latin typeface="Calibri"/>
-              </a:rPr>
-              <a:t>Inicio 5:10 pm</a:t>
-            </a:r>
-          </a:p>
-        </p:txBody>
-      </p:sp>
-      <p:sp>
-        <p:nvSpPr>
-          <p:cNvPr id="6" name="TextBox 5"/>
-          <p:cNvSpPr txBox="1"/>
-          <p:nvPr/>
-        </p:nvSpPr>
-        <p:spPr>
-          <a:xfrm>
             <a:off x="11094415" y="6446520"/>
             <a:ext cx="548640" cy="274320"/>
           </a:xfrm>
@@ -4977,41 +4872,6 @@
         </p:nvSpPr>
         <p:spPr>
           <a:xfrm>
-            <a:off x="2194560" y="6446520"/>
-            <a:ext cx="5943600" cy="274320"/>
-          </a:xfrm>
-          <a:prstGeom prst="rect">
-            <a:avLst/>
-          </a:prstGeom>
-          <a:noFill/>
-        </p:spPr>
-        <p:txBody>
-          <a:bodyPr wrap="square" anchor="t" lIns="0" rIns="0" tIns="0" bIns="0">
-            <a:spAutoFit/>
-          </a:bodyPr>
-          <a:lstStyle/>
-          <a:p>
-            <a:pPr algn="l"/>
-            <a:r>
-              <a:rPr sz="1000" b="1" i="0">
-                <a:solidFill>
-                  <a:srgbClr val="8F989D"/>
-                </a:solidFill>
-                <a:latin typeface="Calibri"/>
-              </a:rPr>
-              <a:t>Inicio 5:10 pm</a:t>
-            </a:r>
-          </a:p>
-        </p:txBody>
-      </p:sp>
-      <p:sp>
-        <p:nvSpPr>
-          <p:cNvPr id="6" name="TextBox 5"/>
-          <p:cNvSpPr txBox="1"/>
-          <p:nvPr/>
-        </p:nvSpPr>
-        <p:spPr>
-          <a:xfrm>
             <a:off x="11094415" y="6446520"/>
             <a:ext cx="548640" cy="274320"/>
           </a:xfrm>
@@ -5515,41 +5375,6 @@
         </p:nvSpPr>
         <p:spPr>
           <a:xfrm>
-            <a:off x="2194560" y="6446520"/>
-            <a:ext cx="5943600" cy="274320"/>
-          </a:xfrm>
-          <a:prstGeom prst="rect">
-            <a:avLst/>
-          </a:prstGeom>
-          <a:noFill/>
-        </p:spPr>
-        <p:txBody>
-          <a:bodyPr wrap="square" anchor="t" lIns="0" rIns="0" tIns="0" bIns="0">
-            <a:spAutoFit/>
-          </a:bodyPr>
-          <a:lstStyle/>
-          <a:p>
-            <a:pPr algn="l"/>
-            <a:r>
-              <a:rPr sz="1000" b="1" i="0">
-                <a:solidFill>
-                  <a:srgbClr val="8F989D"/>
-                </a:solidFill>
-                <a:latin typeface="Calibri"/>
-              </a:rPr>
-              <a:t>Inicio 5:10 pm</a:t>
-            </a:r>
-          </a:p>
-        </p:txBody>
-      </p:sp>
-      <p:sp>
-        <p:nvSpPr>
-          <p:cNvPr id="11" name="TextBox 10"/>
-          <p:cNvSpPr txBox="1"/>
-          <p:nvPr/>
-        </p:nvSpPr>
-        <p:spPr>
-          <a:xfrm>
             <a:off x="11094415" y="6446520"/>
             <a:ext cx="548640" cy="274320"/>
           </a:xfrm>
@@ -6089,41 +5914,6 @@
         </p:nvSpPr>
         <p:spPr>
           <a:xfrm>
-            <a:off x="2194560" y="6446520"/>
-            <a:ext cx="5943600" cy="274320"/>
-          </a:xfrm>
-          <a:prstGeom prst="rect">
-            <a:avLst/>
-          </a:prstGeom>
-          <a:noFill/>
-        </p:spPr>
-        <p:txBody>
-          <a:bodyPr wrap="square" anchor="t" lIns="0" rIns="0" tIns="0" bIns="0">
-            <a:spAutoFit/>
-          </a:bodyPr>
-          <a:lstStyle/>
-          <a:p>
-            <a:pPr algn="l"/>
-            <a:r>
-              <a:rPr sz="1000" b="1" i="0">
-                <a:solidFill>
-                  <a:srgbClr val="8F989D"/>
-                </a:solidFill>
-                <a:latin typeface="Calibri"/>
-              </a:rPr>
-              <a:t>Inicio 5:10 pm</a:t>
-            </a:r>
-          </a:p>
-        </p:txBody>
-      </p:sp>
-      <p:sp>
-        <p:nvSpPr>
-          <p:cNvPr id="11" name="TextBox 10"/>
-          <p:cNvSpPr txBox="1"/>
-          <p:nvPr/>
-        </p:nvSpPr>
-        <p:spPr>
-          <a:xfrm>
             <a:off x="11094415" y="6446520"/>
             <a:ext cx="548640" cy="274320"/>
           </a:xfrm>
@@ -6683,41 +6473,6 @@
         </p:nvSpPr>
         <p:spPr>
           <a:xfrm>
-            <a:off x="2194560" y="6446520"/>
-            <a:ext cx="5943600" cy="274320"/>
-          </a:xfrm>
-          <a:prstGeom prst="rect">
-            <a:avLst/>
-          </a:prstGeom>
-          <a:noFill/>
-        </p:spPr>
-        <p:txBody>
-          <a:bodyPr wrap="square" anchor="t" lIns="0" rIns="0" tIns="0" bIns="0">
-            <a:spAutoFit/>
-          </a:bodyPr>
-          <a:lstStyle/>
-          <a:p>
-            <a:pPr algn="l"/>
-            <a:r>
-              <a:rPr sz="1000" b="1" i="0">
-                <a:solidFill>
-                  <a:srgbClr val="8F989D"/>
-                </a:solidFill>
-                <a:latin typeface="Calibri"/>
-              </a:rPr>
-              <a:t>Inicio 5:10 pm</a:t>
-            </a:r>
-          </a:p>
-        </p:txBody>
-      </p:sp>
-      <p:sp>
-        <p:nvSpPr>
-          <p:cNvPr id="6" name="TextBox 5"/>
-          <p:cNvSpPr txBox="1"/>
-          <p:nvPr/>
-        </p:nvSpPr>
-        <p:spPr>
-          <a:xfrm>
             <a:off x="11094415" y="6446520"/>
             <a:ext cx="548640" cy="274320"/>
           </a:xfrm>
@@ -6985,41 +6740,6 @@
         </p:nvSpPr>
         <p:spPr>
           <a:xfrm>
-            <a:off x="2194560" y="6446520"/>
-            <a:ext cx="5943600" cy="274320"/>
-          </a:xfrm>
-          <a:prstGeom prst="rect">
-            <a:avLst/>
-          </a:prstGeom>
-          <a:noFill/>
-        </p:spPr>
-        <p:txBody>
-          <a:bodyPr wrap="square" anchor="t" lIns="0" rIns="0" tIns="0" bIns="0">
-            <a:spAutoFit/>
-          </a:bodyPr>
-          <a:lstStyle/>
-          <a:p>
-            <a:pPr algn="l"/>
-            <a:r>
-              <a:rPr sz="1000" b="1" i="0">
-                <a:solidFill>
-                  <a:srgbClr val="8F989D"/>
-                </a:solidFill>
-                <a:latin typeface="Calibri"/>
-              </a:rPr>
-              <a:t>Inicio 5:10 pm</a:t>
-            </a:r>
-          </a:p>
-        </p:txBody>
-      </p:sp>
-      <p:sp>
-        <p:nvSpPr>
-          <p:cNvPr id="6" name="TextBox 5"/>
-          <p:cNvSpPr txBox="1"/>
-          <p:nvPr/>
-        </p:nvSpPr>
-        <p:spPr>
-          <a:xfrm>
             <a:off x="11094415" y="6446520"/>
             <a:ext cx="548640" cy="274320"/>
           </a:xfrm>
@@ -7617,41 +7337,6 @@
         </p:nvSpPr>
         <p:spPr>
           <a:xfrm>
-            <a:off x="2194560" y="6446520"/>
-            <a:ext cx="5943600" cy="274320"/>
-          </a:xfrm>
-          <a:prstGeom prst="rect">
-            <a:avLst/>
-          </a:prstGeom>
-          <a:noFill/>
-        </p:spPr>
-        <p:txBody>
-          <a:bodyPr wrap="square" anchor="t" lIns="0" rIns="0" tIns="0" bIns="0">
-            <a:spAutoFit/>
-          </a:bodyPr>
-          <a:lstStyle/>
-          <a:p>
-            <a:pPr algn="l"/>
-            <a:r>
-              <a:rPr sz="1000" b="1" i="0">
-                <a:solidFill>
-                  <a:srgbClr val="8F989D"/>
-                </a:solidFill>
-                <a:latin typeface="Calibri"/>
-              </a:rPr>
-              <a:t>Inicio 5:10 pm</a:t>
-            </a:r>
-          </a:p>
-        </p:txBody>
-      </p:sp>
-      <p:sp>
-        <p:nvSpPr>
-          <p:cNvPr id="6" name="TextBox 5"/>
-          <p:cNvSpPr txBox="1"/>
-          <p:nvPr/>
-        </p:nvSpPr>
-        <p:spPr>
-          <a:xfrm>
             <a:off x="11094415" y="6446520"/>
             <a:ext cx="548640" cy="274320"/>
           </a:xfrm>
@@ -7681,7 +7366,7 @@
       </p:sp>
       <p:sp>
         <p:nvSpPr>
-          <p:cNvPr id="7" name="TextBox 6"/>
+          <p:cNvPr id="6" name="TextBox 5"/>
           <p:cNvSpPr txBox="1"/>
           <p:nvPr/>
         </p:nvSpPr>
@@ -8245,41 +7930,6 @@
         </p:nvSpPr>
         <p:spPr>
           <a:xfrm>
-            <a:off x="2194560" y="6446520"/>
-            <a:ext cx="5943600" cy="274320"/>
-          </a:xfrm>
-          <a:prstGeom prst="rect">
-            <a:avLst/>
-          </a:prstGeom>
-          <a:noFill/>
-        </p:spPr>
-        <p:txBody>
-          <a:bodyPr wrap="square" anchor="t" lIns="0" rIns="0" tIns="0" bIns="0">
-            <a:spAutoFit/>
-          </a:bodyPr>
-          <a:lstStyle/>
-          <a:p>
-            <a:pPr algn="l"/>
-            <a:r>
-              <a:rPr sz="1000" b="1" i="0">
-                <a:solidFill>
-                  <a:srgbClr val="8F989D"/>
-                </a:solidFill>
-                <a:latin typeface="Calibri"/>
-              </a:rPr>
-              <a:t>Inicio 5:10 pm</a:t>
-            </a:r>
-          </a:p>
-        </p:txBody>
-      </p:sp>
-      <p:sp>
-        <p:nvSpPr>
-          <p:cNvPr id="6" name="TextBox 5"/>
-          <p:cNvSpPr txBox="1"/>
-          <p:nvPr/>
-        </p:nvSpPr>
-        <p:spPr>
-          <a:xfrm>
             <a:off x="11094415" y="6446520"/>
             <a:ext cx="548640" cy="274320"/>
           </a:xfrm>
@@ -8495,41 +8145,6 @@
         </p:nvSpPr>
         <p:spPr>
           <a:xfrm>
-            <a:off x="2194560" y="6446520"/>
-            <a:ext cx="5943600" cy="274320"/>
-          </a:xfrm>
-          <a:prstGeom prst="rect">
-            <a:avLst/>
-          </a:prstGeom>
-          <a:noFill/>
-        </p:spPr>
-        <p:txBody>
-          <a:bodyPr wrap="square" anchor="t" lIns="0" rIns="0" tIns="0" bIns="0">
-            <a:spAutoFit/>
-          </a:bodyPr>
-          <a:lstStyle/>
-          <a:p>
-            <a:pPr algn="l"/>
-            <a:r>
-              <a:rPr sz="1000" b="1" i="0">
-                <a:solidFill>
-                  <a:srgbClr val="8F989D"/>
-                </a:solidFill>
-                <a:latin typeface="Calibri"/>
-              </a:rPr>
-              <a:t>Inicio 5:10 pm</a:t>
-            </a:r>
-          </a:p>
-        </p:txBody>
-      </p:sp>
-      <p:sp>
-        <p:nvSpPr>
-          <p:cNvPr id="6" name="TextBox 5"/>
-          <p:cNvSpPr txBox="1"/>
-          <p:nvPr/>
-        </p:nvSpPr>
-        <p:spPr>
-          <a:xfrm>
             <a:off x="11094415" y="6446520"/>
             <a:ext cx="548640" cy="274320"/>
           </a:xfrm>
@@ -9010,41 +8625,6 @@
         </p:nvSpPr>
         <p:spPr>
           <a:xfrm>
-            <a:off x="2194560" y="6446520"/>
-            <a:ext cx="5943600" cy="274320"/>
-          </a:xfrm>
-          <a:prstGeom prst="rect">
-            <a:avLst/>
-          </a:prstGeom>
-          <a:noFill/>
-        </p:spPr>
-        <p:txBody>
-          <a:bodyPr wrap="square" anchor="t" lIns="0" rIns="0" tIns="0" bIns="0">
-            <a:spAutoFit/>
-          </a:bodyPr>
-          <a:lstStyle/>
-          <a:p>
-            <a:pPr algn="l"/>
-            <a:r>
-              <a:rPr sz="1000" b="1" i="0">
-                <a:solidFill>
-                  <a:srgbClr val="8F989D"/>
-                </a:solidFill>
-                <a:latin typeface="Calibri"/>
-              </a:rPr>
-              <a:t>Inicio 5:10 pm</a:t>
-            </a:r>
-          </a:p>
-        </p:txBody>
-      </p:sp>
-      <p:sp>
-        <p:nvSpPr>
-          <p:cNvPr id="6" name="TextBox 5"/>
-          <p:cNvSpPr txBox="1"/>
-          <p:nvPr/>
-        </p:nvSpPr>
-        <p:spPr>
-          <a:xfrm>
             <a:off x="11094415" y="6446520"/>
             <a:ext cx="548640" cy="274320"/>
           </a:xfrm>
@@ -9514,41 +9094,6 @@
         </p:nvSpPr>
         <p:spPr>
           <a:xfrm>
-            <a:off x="2194560" y="6446520"/>
-            <a:ext cx="5943600" cy="274320"/>
-          </a:xfrm>
-          <a:prstGeom prst="rect">
-            <a:avLst/>
-          </a:prstGeom>
-          <a:noFill/>
-        </p:spPr>
-        <p:txBody>
-          <a:bodyPr wrap="square" anchor="t" lIns="0" rIns="0" tIns="0" bIns="0">
-            <a:spAutoFit/>
-          </a:bodyPr>
-          <a:lstStyle/>
-          <a:p>
-            <a:pPr algn="l"/>
-            <a:r>
-              <a:rPr sz="1000" b="1" i="0">
-                <a:solidFill>
-                  <a:srgbClr val="8F989D"/>
-                </a:solidFill>
-                <a:latin typeface="Calibri"/>
-              </a:rPr>
-              <a:t>Inicio 5:10 pm</a:t>
-            </a:r>
-          </a:p>
-        </p:txBody>
-      </p:sp>
-      <p:sp>
-        <p:nvSpPr>
-          <p:cNvPr id="6" name="TextBox 5"/>
-          <p:cNvSpPr txBox="1"/>
-          <p:nvPr/>
-        </p:nvSpPr>
-        <p:spPr>
-          <a:xfrm>
             <a:off x="11094415" y="6446520"/>
             <a:ext cx="548640" cy="274320"/>
           </a:xfrm>
@@ -10027,41 +9572,6 @@
         </p:nvSpPr>
         <p:spPr>
           <a:xfrm>
-            <a:off x="2194560" y="6446520"/>
-            <a:ext cx="5943600" cy="274320"/>
-          </a:xfrm>
-          <a:prstGeom prst="rect">
-            <a:avLst/>
-          </a:prstGeom>
-          <a:noFill/>
-        </p:spPr>
-        <p:txBody>
-          <a:bodyPr wrap="square" anchor="t" lIns="0" rIns="0" tIns="0" bIns="0">
-            <a:spAutoFit/>
-          </a:bodyPr>
-          <a:lstStyle/>
-          <a:p>
-            <a:pPr algn="l"/>
-            <a:r>
-              <a:rPr sz="1000" b="1" i="0">
-                <a:solidFill>
-                  <a:srgbClr val="8F989D"/>
-                </a:solidFill>
-                <a:latin typeface="Calibri"/>
-              </a:rPr>
-              <a:t>Inicio 5:10 pm</a:t>
-            </a:r>
-          </a:p>
-        </p:txBody>
-      </p:sp>
-      <p:sp>
-        <p:nvSpPr>
-          <p:cNvPr id="6" name="TextBox 5"/>
-          <p:cNvSpPr txBox="1"/>
-          <p:nvPr/>
-        </p:nvSpPr>
-        <p:spPr>
-          <a:xfrm>
             <a:off x="11094415" y="6446520"/>
             <a:ext cx="548640" cy="274320"/>
           </a:xfrm>
@@ -10250,41 +9760,6 @@
         </p:nvSpPr>
         <p:spPr>
           <a:xfrm>
-            <a:off x="2194560" y="6446520"/>
-            <a:ext cx="5943600" cy="274320"/>
-          </a:xfrm>
-          <a:prstGeom prst="rect">
-            <a:avLst/>
-          </a:prstGeom>
-          <a:noFill/>
-        </p:spPr>
-        <p:txBody>
-          <a:bodyPr wrap="square" anchor="t" lIns="0" rIns="0" tIns="0" bIns="0">
-            <a:spAutoFit/>
-          </a:bodyPr>
-          <a:lstStyle/>
-          <a:p>
-            <a:pPr algn="l"/>
-            <a:r>
-              <a:rPr sz="1000" b="1" i="0">
-                <a:solidFill>
-                  <a:srgbClr val="8F989D"/>
-                </a:solidFill>
-                <a:latin typeface="Calibri"/>
-              </a:rPr>
-              <a:t>Inicio 5:10 pm</a:t>
-            </a:r>
-          </a:p>
-        </p:txBody>
-      </p:sp>
-      <p:sp>
-        <p:nvSpPr>
-          <p:cNvPr id="6" name="TextBox 5"/>
-          <p:cNvSpPr txBox="1"/>
-          <p:nvPr/>
-        </p:nvSpPr>
-        <p:spPr>
-          <a:xfrm>
             <a:off x="11094415" y="6446520"/>
             <a:ext cx="548640" cy="274320"/>
           </a:xfrm>
@@ -10531,41 +10006,6 @@
           </a:p>
         </p:txBody>
       </p:sp>
-      <p:sp>
-        <p:nvSpPr>
-          <p:cNvPr id="7" name="TextBox 6"/>
-          <p:cNvSpPr txBox="1"/>
-          <p:nvPr/>
-        </p:nvSpPr>
-        <p:spPr>
-          <a:xfrm>
-            <a:off x="2194560" y="6446520"/>
-            <a:ext cx="5943600" cy="274320"/>
-          </a:xfrm>
-          <a:prstGeom prst="rect">
-            <a:avLst/>
-          </a:prstGeom>
-          <a:noFill/>
-        </p:spPr>
-        <p:txBody>
-          <a:bodyPr wrap="square" anchor="t" lIns="0" rIns="0" tIns="0" bIns="0">
-            <a:spAutoFit/>
-          </a:bodyPr>
-          <a:lstStyle/>
-          <a:p>
-            <a:pPr algn="l"/>
-            <a:r>
-              <a:rPr sz="1000" b="1" i="0">
-                <a:solidFill>
-                  <a:srgbClr val="8F989D"/>
-                </a:solidFill>
-                <a:latin typeface="Calibri"/>
-              </a:rPr>
-              <a:t>Inicio 5:10 pm</a:t>
-            </a:r>
-          </a:p>
-        </p:txBody>
-      </p:sp>
     </p:spTree>
   </p:cSld>
   <p:clrMapOvr>
@@ -10972,41 +10412,6 @@
         </p:nvSpPr>
         <p:spPr>
           <a:xfrm>
-            <a:off x="2194560" y="6446520"/>
-            <a:ext cx="5943600" cy="274320"/>
-          </a:xfrm>
-          <a:prstGeom prst="rect">
-            <a:avLst/>
-          </a:prstGeom>
-          <a:noFill/>
-        </p:spPr>
-        <p:txBody>
-          <a:bodyPr wrap="square" anchor="t" lIns="0" rIns="0" tIns="0" bIns="0">
-            <a:spAutoFit/>
-          </a:bodyPr>
-          <a:lstStyle/>
-          <a:p>
-            <a:pPr algn="l"/>
-            <a:r>
-              <a:rPr sz="1000" b="1" i="0">
-                <a:solidFill>
-                  <a:srgbClr val="8F989D"/>
-                </a:solidFill>
-                <a:latin typeface="Calibri"/>
-              </a:rPr>
-              <a:t>Inicio 5:10 pm</a:t>
-            </a:r>
-          </a:p>
-        </p:txBody>
-      </p:sp>
-      <p:sp>
-        <p:nvSpPr>
-          <p:cNvPr id="6" name="TextBox 5"/>
-          <p:cNvSpPr txBox="1"/>
-          <p:nvPr/>
-        </p:nvSpPr>
-        <p:spPr>
-          <a:xfrm>
             <a:off x="11094415" y="6446520"/>
             <a:ext cx="548640" cy="274320"/>
           </a:xfrm>
@@ -11036,7 +10441,7 @@
       </p:sp>
       <p:sp>
         <p:nvSpPr>
-          <p:cNvPr id="7" name="TextBox 6"/>
+          <p:cNvPr id="6" name="TextBox 5"/>
           <p:cNvSpPr txBox="1"/>
           <p:nvPr/>
         </p:nvSpPr>
@@ -11696,41 +11101,6 @@
         </p:nvSpPr>
         <p:spPr>
           <a:xfrm>
-            <a:off x="2194560" y="6446520"/>
-            <a:ext cx="5943600" cy="274320"/>
-          </a:xfrm>
-          <a:prstGeom prst="rect">
-            <a:avLst/>
-          </a:prstGeom>
-          <a:noFill/>
-        </p:spPr>
-        <p:txBody>
-          <a:bodyPr wrap="square" anchor="t" lIns="0" rIns="0" tIns="0" bIns="0">
-            <a:spAutoFit/>
-          </a:bodyPr>
-          <a:lstStyle/>
-          <a:p>
-            <a:pPr algn="l"/>
-            <a:r>
-              <a:rPr sz="1000" b="1" i="0">
-                <a:solidFill>
-                  <a:srgbClr val="8F989D"/>
-                </a:solidFill>
-                <a:latin typeface="Calibri"/>
-              </a:rPr>
-              <a:t>Inicio 5:10 pm</a:t>
-            </a:r>
-          </a:p>
-        </p:txBody>
-      </p:sp>
-      <p:sp>
-        <p:nvSpPr>
-          <p:cNvPr id="7" name="TextBox 6"/>
-          <p:cNvSpPr txBox="1"/>
-          <p:nvPr/>
-        </p:nvSpPr>
-        <p:spPr>
-          <a:xfrm>
             <a:off x="11094415" y="6446520"/>
             <a:ext cx="548640" cy="274320"/>
           </a:xfrm>
@@ -12204,41 +11574,6 @@
       <p:sp>
         <p:nvSpPr>
           <p:cNvPr id="5" name="TextBox 4"/>
-          <p:cNvSpPr txBox="1"/>
-          <p:nvPr/>
-        </p:nvSpPr>
-        <p:spPr>
-          <a:xfrm>
-            <a:off x="2194560" y="6446520"/>
-            <a:ext cx="5943600" cy="274320"/>
-          </a:xfrm>
-          <a:prstGeom prst="rect">
-            <a:avLst/>
-          </a:prstGeom>
-          <a:noFill/>
-        </p:spPr>
-        <p:txBody>
-          <a:bodyPr wrap="square" anchor="t" lIns="0" rIns="0" tIns="0" bIns="0">
-            <a:spAutoFit/>
-          </a:bodyPr>
-          <a:lstStyle/>
-          <a:p>
-            <a:pPr algn="l"/>
-            <a:r>
-              <a:rPr sz="1000" b="1" i="0">
-                <a:solidFill>
-                  <a:srgbClr val="8F989D"/>
-                </a:solidFill>
-                <a:latin typeface="Calibri"/>
-              </a:rPr>
-              <a:t>Inicio 5:10 pm</a:t>
-            </a:r>
-          </a:p>
-        </p:txBody>
-      </p:sp>
-      <p:sp>
-        <p:nvSpPr>
-          <p:cNvPr id="6" name="TextBox 5"/>
           <p:cNvSpPr txBox="1"/>
           <p:nvPr/>
         </p:nvSpPr>
@@ -12908,41 +12243,6 @@
         </p:nvSpPr>
         <p:spPr>
           <a:xfrm>
-            <a:off x="2194560" y="6446520"/>
-            <a:ext cx="5943600" cy="274320"/>
-          </a:xfrm>
-          <a:prstGeom prst="rect">
-            <a:avLst/>
-          </a:prstGeom>
-          <a:noFill/>
-        </p:spPr>
-        <p:txBody>
-          <a:bodyPr wrap="square" anchor="t" lIns="0" rIns="0" tIns="0" bIns="0">
-            <a:spAutoFit/>
-          </a:bodyPr>
-          <a:lstStyle/>
-          <a:p>
-            <a:pPr algn="l"/>
-            <a:r>
-              <a:rPr sz="1000" b="1" i="0">
-                <a:solidFill>
-                  <a:srgbClr val="8F989D"/>
-                </a:solidFill>
-                <a:latin typeface="Calibri"/>
-              </a:rPr>
-              <a:t>Inicio 5:10 pm</a:t>
-            </a:r>
-          </a:p>
-        </p:txBody>
-      </p:sp>
-      <p:sp>
-        <p:nvSpPr>
-          <p:cNvPr id="7" name="TextBox 6"/>
-          <p:cNvSpPr txBox="1"/>
-          <p:nvPr/>
-        </p:nvSpPr>
-        <p:spPr>
-          <a:xfrm>
             <a:off x="11094415" y="6446520"/>
             <a:ext cx="548640" cy="274320"/>
           </a:xfrm>
@@ -13491,41 +12791,6 @@
         </p:nvSpPr>
         <p:spPr>
           <a:xfrm>
-            <a:off x="2194560" y="6446520"/>
-            <a:ext cx="5943600" cy="274320"/>
-          </a:xfrm>
-          <a:prstGeom prst="rect">
-            <a:avLst/>
-          </a:prstGeom>
-          <a:noFill/>
-        </p:spPr>
-        <p:txBody>
-          <a:bodyPr wrap="square" anchor="t" lIns="0" rIns="0" tIns="0" bIns="0">
-            <a:spAutoFit/>
-          </a:bodyPr>
-          <a:lstStyle/>
-          <a:p>
-            <a:pPr algn="l"/>
-            <a:r>
-              <a:rPr sz="1000" b="1" i="0">
-                <a:solidFill>
-                  <a:srgbClr val="8F989D"/>
-                </a:solidFill>
-                <a:latin typeface="Calibri"/>
-              </a:rPr>
-              <a:t>Inicio 5:10 pm</a:t>
-            </a:r>
-          </a:p>
-        </p:txBody>
-      </p:sp>
-      <p:sp>
-        <p:nvSpPr>
-          <p:cNvPr id="7" name="TextBox 6"/>
-          <p:cNvSpPr txBox="1"/>
-          <p:nvPr/>
-        </p:nvSpPr>
-        <p:spPr>
-          <a:xfrm>
             <a:off x="11094415" y="6446520"/>
             <a:ext cx="548640" cy="274320"/>
           </a:xfrm>
@@ -13893,41 +13158,6 @@
         </p:nvSpPr>
         <p:spPr>
           <a:xfrm>
-            <a:off x="2194560" y="6446520"/>
-            <a:ext cx="5943600" cy="274320"/>
-          </a:xfrm>
-          <a:prstGeom prst="rect">
-            <a:avLst/>
-          </a:prstGeom>
-          <a:noFill/>
-        </p:spPr>
-        <p:txBody>
-          <a:bodyPr wrap="square" anchor="t" lIns="0" rIns="0" tIns="0" bIns="0">
-            <a:spAutoFit/>
-          </a:bodyPr>
-          <a:lstStyle/>
-          <a:p>
-            <a:pPr algn="l"/>
-            <a:r>
-              <a:rPr sz="1000" b="1" i="0">
-                <a:solidFill>
-                  <a:srgbClr val="8F989D"/>
-                </a:solidFill>
-                <a:latin typeface="Calibri"/>
-              </a:rPr>
-              <a:t>Inicio 5:10 pm</a:t>
-            </a:r>
-          </a:p>
-        </p:txBody>
-      </p:sp>
-      <p:sp>
-        <p:nvSpPr>
-          <p:cNvPr id="6" name="TextBox 5"/>
-          <p:cNvSpPr txBox="1"/>
-          <p:nvPr/>
-        </p:nvSpPr>
-        <p:spPr>
-          <a:xfrm>
             <a:off x="11094415" y="6446520"/>
             <a:ext cx="548640" cy="274320"/>
           </a:xfrm>
@@ -14204,41 +13434,6 @@
       <p:sp>
         <p:nvSpPr>
           <p:cNvPr id="5" name="TextBox 4"/>
-          <p:cNvSpPr txBox="1"/>
-          <p:nvPr/>
-        </p:nvSpPr>
-        <p:spPr>
-          <a:xfrm>
-            <a:off x="2194560" y="6446520"/>
-            <a:ext cx="5943600" cy="274320"/>
-          </a:xfrm>
-          <a:prstGeom prst="rect">
-            <a:avLst/>
-          </a:prstGeom>
-          <a:noFill/>
-        </p:spPr>
-        <p:txBody>
-          <a:bodyPr wrap="square" anchor="t" lIns="0" rIns="0" tIns="0" bIns="0">
-            <a:spAutoFit/>
-          </a:bodyPr>
-          <a:lstStyle/>
-          <a:p>
-            <a:pPr algn="l"/>
-            <a:r>
-              <a:rPr sz="1000" b="1" i="0">
-                <a:solidFill>
-                  <a:srgbClr val="8F989D"/>
-                </a:solidFill>
-                <a:latin typeface="Calibri"/>
-              </a:rPr>
-              <a:t>Inicio 5:10 pm</a:t>
-            </a:r>
-          </a:p>
-        </p:txBody>
-      </p:sp>
-      <p:sp>
-        <p:nvSpPr>
-          <p:cNvPr id="6" name="TextBox 5"/>
           <p:cNvSpPr txBox="1"/>
           <p:nvPr/>
         </p:nvSpPr>

--- a/Pregrado/Creatividad y pensamiento innovador/Clases/Sesion 07 - Innovación local–internacional · entidades de apoyo/Presentacion.pptx
+++ b/Pregrado/Creatividad y pensamiento innovador/Clases/Sesion 07 - Innovación local–internacional · entidades de apoyo/Presentacion.pptx
@@ -8105,7 +8105,7 @@
                 </a:solidFill>
                 <a:latin typeface="Calibri"/>
               </a:rPr>
-              <a:t>`S08_EcosistemaPitch_Apellido`</a:t>
+              <a:t>`S07_EcosistemaPitch_Apellido`</a:t>
             </a:r>
             <a:r>
               <a:rPr sz="1600" b="0" i="0">
@@ -9450,7 +9450,7 @@
                 </a:solidFill>
                 <a:latin typeface="Calibri"/>
               </a:rPr>
-              <a:t>`S08_EcosistemaPitch_Apellido`</a:t>
+              <a:t>`S07_EcosistemaPitch_Apellido`</a:t>
             </a:r>
             <a:r>
               <a:rPr sz="1600" b="0" i="0">
